--- a/doc/lambda_sweep4.pptx
+++ b/doc/lambda_sweep4.pptx
@@ -22716,6 +22716,10 @@
             <a:prstDash val="solid"/>
           </a:ln>
         </p:spPr>
+        <p:txBody>
+          <a:bodyPr/>
+          <a:p/>
+        </p:txBody>
       </p:sp>
       <p:sp>
         <p:nvSpPr>
@@ -22736,6 +22740,10 @@
           </a:solidFill>
           <a:ln/>
         </p:spPr>
+        <p:txBody>
+          <a:bodyPr/>
+          <a:p/>
+        </p:txBody>
       </p:sp>
       <p:sp>
         <p:nvSpPr>
@@ -22756,6 +22764,10 @@
           </a:solidFill>
           <a:ln/>
         </p:spPr>
+        <p:txBody>
+          <a:bodyPr/>
+          <a:p/>
+        </p:txBody>
       </p:sp>
       <p:sp>
         <p:nvSpPr>
@@ -22954,6 +22966,10 @@
             <a:prstDash val="solid"/>
           </a:ln>
         </p:spPr>
+        <p:txBody>
+          <a:bodyPr/>
+          <a:p/>
+        </p:txBody>
       </p:sp>
       <p:sp>
         <p:nvSpPr>
@@ -22974,6 +22990,10 @@
           </a:solidFill>
           <a:ln/>
         </p:spPr>
+        <p:txBody>
+          <a:bodyPr/>
+          <a:p/>
+        </p:txBody>
       </p:sp>
       <p:sp>
         <p:nvSpPr>
@@ -22994,6 +23014,10 @@
           </a:solidFill>
           <a:ln/>
         </p:spPr>
+        <p:txBody>
+          <a:bodyPr/>
+          <a:p/>
+        </p:txBody>
       </p:sp>
       <p:sp>
         <p:nvSpPr>
@@ -23106,7 +23130,7 @@
                 <a:ea typeface="Calibri" pitchFamily="34" charset="-122"/>
                 <a:cs typeface="Calibri" pitchFamily="34" charset="-120"/>
               </a:rPr>
-              <a:t>Reduce travel time at sum_x ≈ target_cells</a:t>
+              <a:t>Reduce travel time at sum_y = today's cell count</a:t>
             </a:r>
             <a:endParaRPr lang="en-US" sz="1300" dirty="0"/>
           </a:p>
@@ -23145,7 +23169,7 @@
                 <a:ea typeface="Calibri" pitchFamily="34" charset="-122"/>
                 <a:cs typeface="Calibri" pitchFamily="34" charset="-120"/>
               </a:rPr>
-              <a:t>min Σ wᵢ·c(tᵢⱼ)·yₖ + λ·Σⱼxⱼ</a:t>
+              <a:t>min Σᵢ popᵢ·c(tᵢⱼ)·xᵢⱼ + λ·Σⱼ yⱼ   (p7)</a:t>
             </a:r>
             <a:endParaRPr lang="en-US" sz="1200" dirty="0"/>
           </a:p>
@@ -23162,7 +23186,7 @@
                 <a:ea typeface="Calibri" pitchFamily="34" charset="-122"/>
                 <a:cs typeface="Calibri" pitchFamily="34" charset="-120"/>
               </a:rPr>
-              <a:t>Sweep λ to land sum_x at the baseline cell count.</a:t>
+              <a:t>Bisection over λ pins the count at today's, within max(1, 0.2%) (#52).</a:t>
             </a:r>
             <a:endParaRPr lang="en-US" sz="1200" dirty="0"/>
           </a:p>
@@ -23179,7 +23203,7 @@
                 <a:ea typeface="Calibri" pitchFamily="34" charset="-122"/>
                 <a:cs typeface="Calibri" pitchFamily="34" charset="-120"/>
               </a:rPr>
-              <a:t>LP-relaxation of UFLP, strong linking yₖ ≤ x_{j(k)}.</a:t>
+              <a:t>LP relaxation of the UFLP, strong linking xᵢⱼ ≤ yⱼ; at fixed p a p-median (pMP).</a:t>
             </a:r>
             <a:endParaRPr lang="en-US" sz="1200" dirty="0"/>
           </a:p>
@@ -23209,6 +23233,10 @@
             <a:prstDash val="solid"/>
           </a:ln>
         </p:spPr>
+        <p:txBody>
+          <a:bodyPr/>
+          <a:p/>
+        </p:txBody>
       </p:sp>
       <p:sp>
         <p:nvSpPr>
@@ -23229,6 +23257,10 @@
           </a:solidFill>
           <a:ln/>
         </p:spPr>
+        <p:txBody>
+          <a:bodyPr/>
+          <a:p/>
+        </p:txBody>
       </p:sp>
       <p:sp>
         <p:nvSpPr>
@@ -23249,6 +23281,10 @@
           </a:solidFill>
           <a:ln/>
         </p:spPr>
+        <p:txBody>
+          <a:bodyPr/>
+          <a:p/>
+        </p:txBody>
       </p:sp>
       <p:sp>
         <p:nvSpPr>
@@ -23361,7 +23397,7 @@
                 <a:ea typeface="Calibri" pitchFamily="34" charset="-122"/>
                 <a:cs typeface="Calibri" pitchFamily="34" charset="-120"/>
               </a:rPr>
-              <a:t>Reduce #facilities at C ≈ baseline cost</a:t>
+              <a:t>Reduce #facilities at travel = today's</a:t>
             </a:r>
             <a:endParaRPr lang="en-US" sz="1300" dirty="0"/>
           </a:p>
@@ -23417,7 +23453,7 @@
                 <a:ea typeface="Calibri" pitchFamily="34" charset="-122"/>
                 <a:cs typeface="Calibri" pitchFamily="34" charset="-120"/>
               </a:rPr>
-              <a:t>Closest point on sweep to the baseline travel cost; trade fewer pharmacies for the same access.</a:t>
+              <a:t>Bisection over λ pins travel at today's, within 0.2%; fewer pharmacies for the same access.</a:t>
             </a:r>
             <a:endParaRPr lang="en-US" sz="1200" dirty="0"/>
           </a:p>
@@ -23447,6 +23483,10 @@
             <a:prstDash val="solid"/>
           </a:ln>
         </p:spPr>
+        <p:txBody>
+          <a:bodyPr/>
+          <a:p/>
+        </p:txBody>
       </p:sp>
       <p:sp>
         <p:nvSpPr>
@@ -23467,6 +23507,10 @@
           </a:solidFill>
           <a:ln/>
         </p:spPr>
+        <p:txBody>
+          <a:bodyPr/>
+          <a:p/>
+        </p:txBody>
       </p:sp>
       <p:sp>
         <p:nvSpPr>
@@ -23487,6 +23531,10 @@
           </a:solidFill>
           <a:ln/>
         </p:spPr>
+        <p:txBody>
+          <a:bodyPr/>
+          <a:p/>
+        </p:txBody>
       </p:sp>
       <p:sp>
         <p:nvSpPr>
@@ -23638,7 +23686,7 @@
                 <a:ea typeface="Calibri" pitchFamily="34" charset="-122"/>
                 <a:cs typeface="Calibri" pitchFamily="34" charset="-120"/>
               </a:rPr>
-              <a:t>Coarse sweep w ∈ {1e-5 … 1e3}, then fine sweep bracketing the S1 and S2 targets.</a:t>
+              <a:t>1-2-5 grid per decade, w ∈ {1e-4 … 5}, extended upward until S1 brackets; then bisection to S1 and S2.</a:t>
             </a:r>
             <a:endParaRPr lang="en-US" sz="1200" dirty="0"/>
           </a:p>
@@ -23655,7 +23703,7 @@
                 <a:ea typeface="Calibri" pitchFamily="34" charset="-122"/>
                 <a:cs typeface="Calibri" pitchFamily="34" charset="-120"/>
               </a:rPr>
-              <a:t>Report sum_x and travel cost at each λ.</a:t>
+              <a:t>Report sum_y, the travel bounds and the rounded n_open at each λ.</a:t>
             </a:r>
             <a:endParaRPr lang="en-US" sz="1200" dirty="0"/>
           </a:p>
@@ -27065,7 +27113,7 @@
                 <a:ea typeface="Georgia" pitchFamily="34" charset="-122"/>
                 <a:cs typeface="Georgia" pitchFamily="34" charset="-120"/>
               </a:rPr>
-              <a:t>Two competing objectives</a:t>
+              <a:t>Two competing objectives — proximity vs efficiency</a:t>
             </a:r>
             <a:endParaRPr lang="en-US" sz="2000" dirty="0"/>
           </a:p>
@@ -27143,7 +27191,7 @@
                 <a:ea typeface="Calibri" pitchFamily="34" charset="-122"/>
                 <a:cs typeface="Calibri" pitchFamily="34" charset="-120"/>
               </a:rPr>
-              <a:t> — sum_x, the LP-relaxed number of opened pharmacies.</a:t>
+              <a:t> — sum_y, the LP-relaxed number of opened pharmacies.</a:t>
             </a:r>
             <a:endParaRPr lang="en-US" sz="1400" dirty="0"/>
           </a:p>
@@ -27238,7 +27286,7 @@
                 <a:ea typeface="Calibri" pitchFamily="34" charset="-122"/>
                 <a:cs typeface="Calibri" pitchFamily="34" charset="-120"/>
               </a:rPr>
-              <a:t>Each λ gives one Pareto point (sum_x, travel_c).</a:t>
+              <a:t>Each λ gives one Pareto point (sum_y, travel_c).</a:t>
             </a:r>
             <a:endParaRPr lang="en-US" sz="1400" dirty="0"/>
           </a:p>
@@ -27289,7 +27337,7 @@
                 <a:ea typeface="Calibri" pitchFamily="34" charset="-122"/>
                 <a:cs typeface="Calibri" pitchFamily="34" charset="-120"/>
               </a:rPr>
-              <a:t>S1 and S2 are two specific points on the same curve.</a:t>
+              <a:t>S1 and S2 are two points on the same curve; the diagonal crossing between them is Lewis's cross-lambda (p72).</a:t>
             </a:r>
             <a:endParaRPr lang="en-US" sz="1400" dirty="0"/>
           </a:p>
@@ -27336,6 +27384,10 @@
             <a:prstDash val="solid"/>
           </a:ln>
         </p:spPr>
+        <p:txBody>
+          <a:bodyPr/>
+          <a:p/>
+        </p:txBody>
       </p:sp>
       <p:sp>
         <p:nvSpPr>
@@ -27398,6 +27450,10 @@
             <a:prstDash val="solid"/>
           </a:ln>
         </p:spPr>
+        <p:txBody>
+          <a:bodyPr/>
+          <a:p/>
+        </p:txBody>
       </p:sp>
       <p:sp>
         <p:nvSpPr>
@@ -27421,6 +27477,10 @@
             <a:prstDash val="solid"/>
           </a:ln>
         </p:spPr>
+        <p:txBody>
+          <a:bodyPr/>
+          <a:p/>
+        </p:txBody>
       </p:sp>
       <p:sp>
         <p:nvSpPr>
@@ -27444,6 +27504,10 @@
             <a:prstDash val="solid"/>
           </a:ln>
         </p:spPr>
+        <p:txBody>
+          <a:bodyPr/>
+          <a:p/>
+        </p:txBody>
       </p:sp>
       <p:sp>
         <p:nvSpPr>
@@ -27467,6 +27531,10 @@
             <a:prstDash val="solid"/>
           </a:ln>
         </p:spPr>
+        <p:txBody>
+          <a:bodyPr/>
+          <a:p/>
+        </p:txBody>
       </p:sp>
       <p:sp>
         <p:nvSpPr>
@@ -27490,6 +27558,10 @@
             <a:prstDash val="solid"/>
           </a:ln>
         </p:spPr>
+        <p:txBody>
+          <a:bodyPr/>
+          <a:p/>
+        </p:txBody>
       </p:sp>
       <p:sp>
         <p:nvSpPr>
@@ -27513,6 +27585,10 @@
             <a:prstDash val="solid"/>
           </a:ln>
         </p:spPr>
+        <p:txBody>
+          <a:bodyPr/>
+          <a:p/>
+        </p:txBody>
       </p:sp>
       <p:sp>
         <p:nvSpPr>
@@ -27536,6 +27612,10 @@
             <a:prstDash val="solid"/>
           </a:ln>
         </p:spPr>
+        <p:txBody>
+          <a:bodyPr/>
+          <a:p/>
+        </p:txBody>
       </p:sp>
       <p:sp>
         <p:nvSpPr>
@@ -27559,6 +27639,10 @@
             <a:prstDash val="solid"/>
           </a:ln>
         </p:spPr>
+        <p:txBody>
+          <a:bodyPr/>
+          <a:p/>
+        </p:txBody>
       </p:sp>
       <p:sp>
         <p:nvSpPr>
@@ -27582,6 +27666,10 @@
             <a:prstDash val="solid"/>
           </a:ln>
         </p:spPr>
+        <p:txBody>
+          <a:bodyPr/>
+          <a:p/>
+        </p:txBody>
       </p:sp>
       <p:sp>
         <p:nvSpPr>
@@ -27605,6 +27693,10 @@
             <a:prstDash val="solid"/>
           </a:ln>
         </p:spPr>
+        <p:txBody>
+          <a:bodyPr/>
+          <a:p/>
+        </p:txBody>
       </p:sp>
       <p:sp>
         <p:nvSpPr>
@@ -27628,6 +27720,10 @@
             <a:prstDash val="solid"/>
           </a:ln>
         </p:spPr>
+        <p:txBody>
+          <a:bodyPr/>
+          <a:p/>
+        </p:txBody>
       </p:sp>
       <p:sp>
         <p:nvSpPr>
@@ -27651,6 +27747,10 @@
             <a:prstDash val="solid"/>
           </a:ln>
         </p:spPr>
+        <p:txBody>
+          <a:bodyPr/>
+          <a:p/>
+        </p:txBody>
       </p:sp>
       <p:sp>
         <p:nvSpPr>
@@ -27674,6 +27774,10 @@
             <a:prstDash val="solid"/>
           </a:ln>
         </p:spPr>
+        <p:txBody>
+          <a:bodyPr/>
+          <a:p/>
+        </p:txBody>
       </p:sp>
       <p:sp>
         <p:nvSpPr>
@@ -27697,6 +27801,10 @@
             <a:prstDash val="solid"/>
           </a:ln>
         </p:spPr>
+        <p:txBody>
+          <a:bodyPr/>
+          <a:p/>
+        </p:txBody>
       </p:sp>
       <p:sp>
         <p:nvSpPr>
@@ -27720,6 +27828,10 @@
             <a:prstDash val="solid"/>
           </a:ln>
         </p:spPr>
+        <p:txBody>
+          <a:bodyPr/>
+          <a:p/>
+        </p:txBody>
       </p:sp>
       <p:sp>
         <p:nvSpPr>
@@ -27743,6 +27855,10 @@
             <a:prstDash val="solid"/>
           </a:ln>
         </p:spPr>
+        <p:txBody>
+          <a:bodyPr/>
+          <a:p/>
+        </p:txBody>
       </p:sp>
       <p:sp>
         <p:nvSpPr>
@@ -27766,6 +27882,10 @@
             <a:prstDash val="solid"/>
           </a:ln>
         </p:spPr>
+        <p:txBody>
+          <a:bodyPr/>
+          <a:p/>
+        </p:txBody>
       </p:sp>
       <p:sp>
         <p:nvSpPr>
@@ -27789,6 +27909,10 @@
             <a:prstDash val="solid"/>
           </a:ln>
         </p:spPr>
+        <p:txBody>
+          <a:bodyPr/>
+          <a:p/>
+        </p:txBody>
       </p:sp>
       <p:sp>
         <p:nvSpPr>
@@ -27812,6 +27936,10 @@
             <a:prstDash val="solid"/>
           </a:ln>
         </p:spPr>
+        <p:txBody>
+          <a:bodyPr/>
+          <a:p/>
+        </p:txBody>
       </p:sp>
       <p:sp>
         <p:nvSpPr>
@@ -27835,6 +27963,10 @@
             <a:prstDash val="solid"/>
           </a:ln>
         </p:spPr>
+        <p:txBody>
+          <a:bodyPr/>
+          <a:p/>
+        </p:txBody>
       </p:sp>
       <p:sp>
         <p:nvSpPr>
@@ -27858,6 +27990,10 @@
             <a:prstDash val="solid"/>
           </a:ln>
         </p:spPr>
+        <p:txBody>
+          <a:bodyPr/>
+          <a:p/>
+        </p:txBody>
       </p:sp>
       <p:sp>
         <p:nvSpPr>
@@ -27881,6 +28017,10 @@
             <a:prstDash val="solid"/>
           </a:ln>
         </p:spPr>
+        <p:txBody>
+          <a:bodyPr/>
+          <a:p/>
+        </p:txBody>
       </p:sp>
       <p:sp>
         <p:nvSpPr>
@@ -27904,6 +28044,10 @@
             <a:prstDash val="solid"/>
           </a:ln>
         </p:spPr>
+        <p:txBody>
+          <a:bodyPr/>
+          <a:p/>
+        </p:txBody>
       </p:sp>
       <p:sp>
         <p:nvSpPr>
@@ -27927,6 +28071,10 @@
             <a:prstDash val="solid"/>
           </a:ln>
         </p:spPr>
+        <p:txBody>
+          <a:bodyPr/>
+          <a:p/>
+        </p:txBody>
       </p:sp>
       <p:sp>
         <p:nvSpPr>
@@ -27950,6 +28098,10 @@
             <a:prstDash val="solid"/>
           </a:ln>
         </p:spPr>
+        <p:txBody>
+          <a:bodyPr/>
+          <a:p/>
+        </p:txBody>
       </p:sp>
       <p:sp>
         <p:nvSpPr>
@@ -27973,6 +28125,10 @@
             <a:prstDash val="solid"/>
           </a:ln>
         </p:spPr>
+        <p:txBody>
+          <a:bodyPr/>
+          <a:p/>
+        </p:txBody>
       </p:sp>
       <p:sp>
         <p:nvSpPr>
@@ -27996,6 +28152,10 @@
             <a:prstDash val="solid"/>
           </a:ln>
         </p:spPr>
+        <p:txBody>
+          <a:bodyPr/>
+          <a:p/>
+        </p:txBody>
       </p:sp>
       <p:sp>
         <p:nvSpPr>
@@ -28019,6 +28179,10 @@
             <a:prstDash val="solid"/>
           </a:ln>
         </p:spPr>
+        <p:txBody>
+          <a:bodyPr/>
+          <a:p/>
+        </p:txBody>
       </p:sp>
       <p:sp>
         <p:nvSpPr>
@@ -28042,6 +28206,10 @@
             <a:prstDash val="solid"/>
           </a:ln>
         </p:spPr>
+        <p:txBody>
+          <a:bodyPr/>
+          <a:p/>
+        </p:txBody>
       </p:sp>
       <p:sp>
         <p:nvSpPr>
@@ -28065,6 +28233,10 @@
             <a:prstDash val="solid"/>
           </a:ln>
         </p:spPr>
+        <p:txBody>
+          <a:bodyPr/>
+          <a:p/>
+        </p:txBody>
       </p:sp>
       <p:sp>
         <p:nvSpPr>
@@ -28088,6 +28260,10 @@
             <a:prstDash val="solid"/>
           </a:ln>
         </p:spPr>
+        <p:txBody>
+          <a:bodyPr/>
+          <a:p/>
+        </p:txBody>
       </p:sp>
       <p:sp>
         <p:nvSpPr>
@@ -28111,6 +28287,10 @@
             <a:prstDash val="solid"/>
           </a:ln>
         </p:spPr>
+        <p:txBody>
+          <a:bodyPr/>
+          <a:p/>
+        </p:txBody>
       </p:sp>
       <p:sp>
         <p:nvSpPr>
@@ -28134,6 +28314,10 @@
             <a:prstDash val="solid"/>
           </a:ln>
         </p:spPr>
+        <p:txBody>
+          <a:bodyPr/>
+          <a:p/>
+        </p:txBody>
       </p:sp>
       <p:sp>
         <p:nvSpPr>
@@ -28157,6 +28341,10 @@
             <a:prstDash val="solid"/>
           </a:ln>
         </p:spPr>
+        <p:txBody>
+          <a:bodyPr/>
+          <a:p/>
+        </p:txBody>
       </p:sp>
       <p:sp>
         <p:nvSpPr>
@@ -28180,6 +28368,10 @@
             <a:prstDash val="solid"/>
           </a:ln>
         </p:spPr>
+        <p:txBody>
+          <a:bodyPr/>
+          <a:p/>
+        </p:txBody>
       </p:sp>
       <p:sp>
         <p:nvSpPr>
@@ -28203,6 +28395,10 @@
             <a:prstDash val="solid"/>
           </a:ln>
         </p:spPr>
+        <p:txBody>
+          <a:bodyPr/>
+          <a:p/>
+        </p:txBody>
       </p:sp>
       <p:sp>
         <p:nvSpPr>
@@ -28226,6 +28422,10 @@
             <a:prstDash val="solid"/>
           </a:ln>
         </p:spPr>
+        <p:txBody>
+          <a:bodyPr/>
+          <a:p/>
+        </p:txBody>
       </p:sp>
       <p:sp>
         <p:nvSpPr>
@@ -28249,6 +28449,10 @@
             <a:prstDash val="solid"/>
           </a:ln>
         </p:spPr>
+        <p:txBody>
+          <a:bodyPr/>
+          <a:p/>
+        </p:txBody>
       </p:sp>
       <p:sp>
         <p:nvSpPr>
@@ -28272,6 +28476,10 @@
             <a:prstDash val="solid"/>
           </a:ln>
         </p:spPr>
+        <p:txBody>
+          <a:bodyPr/>
+          <a:p/>
+        </p:txBody>
       </p:sp>
       <p:sp>
         <p:nvSpPr>
@@ -28295,6 +28503,10 @@
             <a:prstDash val="solid"/>
           </a:ln>
         </p:spPr>
+        <p:txBody>
+          <a:bodyPr/>
+          <a:p/>
+        </p:txBody>
       </p:sp>
       <p:sp>
         <p:nvSpPr>
@@ -28318,6 +28530,10 @@
             <a:prstDash val="solid"/>
           </a:ln>
         </p:spPr>
+        <p:txBody>
+          <a:bodyPr/>
+          <a:p/>
+        </p:txBody>
       </p:sp>
       <p:sp>
         <p:nvSpPr>
@@ -28341,6 +28557,10 @@
             <a:prstDash val="solid"/>
           </a:ln>
         </p:spPr>
+        <p:txBody>
+          <a:bodyPr/>
+          <a:p/>
+        </p:txBody>
       </p:sp>
       <p:sp>
         <p:nvSpPr>
@@ -28364,6 +28584,10 @@
             <a:prstDash val="solid"/>
           </a:ln>
         </p:spPr>
+        <p:txBody>
+          <a:bodyPr/>
+          <a:p/>
+        </p:txBody>
       </p:sp>
       <p:sp>
         <p:nvSpPr>
@@ -28387,6 +28611,10 @@
             <a:prstDash val="solid"/>
           </a:ln>
         </p:spPr>
+        <p:txBody>
+          <a:bodyPr/>
+          <a:p/>
+        </p:txBody>
       </p:sp>
       <p:sp>
         <p:nvSpPr>
@@ -28410,6 +28638,10 @@
             <a:prstDash val="solid"/>
           </a:ln>
         </p:spPr>
+        <p:txBody>
+          <a:bodyPr/>
+          <a:p/>
+        </p:txBody>
       </p:sp>
       <p:sp>
         <p:nvSpPr>
@@ -28433,6 +28665,10 @@
             <a:prstDash val="dash"/>
           </a:ln>
         </p:spPr>
+        <p:txBody>
+          <a:bodyPr/>
+          <a:p/>
+        </p:txBody>
       </p:sp>
       <p:sp>
         <p:nvSpPr>
@@ -28456,6 +28692,10 @@
             <a:prstDash val="dash"/>
           </a:ln>
         </p:spPr>
+        <p:txBody>
+          <a:bodyPr/>
+          <a:p/>
+        </p:txBody>
       </p:sp>
       <p:sp>
         <p:nvSpPr>
@@ -28481,6 +28721,10 @@
             <a:prstDash val="solid"/>
           </a:ln>
         </p:spPr>
+        <p:txBody>
+          <a:bodyPr/>
+          <a:p/>
+        </p:txBody>
       </p:sp>
       <p:sp>
         <p:nvSpPr>
@@ -28545,6 +28789,10 @@
             <a:prstDash val="solid"/>
           </a:ln>
         </p:spPr>
+        <p:txBody>
+          <a:bodyPr/>
+          <a:p/>
+        </p:txBody>
       </p:sp>
       <p:sp>
         <p:nvSpPr>
@@ -28609,6 +28857,10 @@
             <a:prstDash val="solid"/>
           </a:ln>
         </p:spPr>
+        <p:txBody>
+          <a:bodyPr/>
+          <a:p/>
+        </p:txBody>
       </p:sp>
       <p:sp>
         <p:nvSpPr>
@@ -28682,7 +28934,7 @@
                 <a:ea typeface="Calibri" pitchFamily="34" charset="-122"/>
                 <a:cs typeface="Calibri" pitchFamily="34" charset="-120"/>
               </a:rPr>
-              <a:t>← fewer facilities     sum_x     more facilities →</a:t>
+              <a:t>← fewer facilities     sum_y     more facilities →</a:t>
             </a:r>
             <a:endParaRPr lang="en-US" sz="1000" dirty="0"/>
           </a:p>
@@ -28760,7 +29012,7 @@
                 <a:ea typeface="Calibri" pitchFamily="34" charset="-122"/>
                 <a:cs typeface="Calibri" pitchFamily="34" charset="-120"/>
               </a:rPr>
-              <a:t>With the strong-linking LP, sum_x is a continuous lower bound on integer facility count.</a:t>
+              <a:t>With the strong-linking LP, sum_y is a continuous lower bound on integer facility count.</a:t>
             </a:r>
             <a:endParaRPr lang="en-US" sz="1000" dirty="0"/>
           </a:p>
@@ -28832,7 +29084,7 @@
                 <a:ea typeface="Calibri" pitchFamily="34" charset="-122"/>
                 <a:cs typeface="Calibri" pitchFamily="34" charset="-120"/>
               </a:rPr>
-              <a:t>WHY FRACTIONAL SUM_X IS INFORMATIVE, NOT NOISE</a:t>
+              <a:t>WHY FRACTIONAL SUM_Y IS INFORMATIVE, NOT NOISE</a:t>
             </a:r>
             <a:endParaRPr lang="en-US" sz="1100" dirty="0"/>
           </a:p>
@@ -28901,6 +29153,10 @@
             <a:prstDash val="solid"/>
           </a:ln>
         </p:spPr>
+        <p:txBody>
+          <a:bodyPr/>
+          <a:p/>
+        </p:txBody>
       </p:sp>
       <p:sp>
         <p:nvSpPr>
@@ -28926,6 +29182,10 @@
             <a:tailEnd type="none"/>
           </a:ln>
         </p:spPr>
+        <p:txBody>
+          <a:bodyPr/>
+          <a:p/>
+        </p:txBody>
       </p:sp>
       <p:sp>
         <p:nvSpPr>
@@ -28951,6 +29211,10 @@
             <a:tailEnd type="none"/>
           </a:ln>
         </p:spPr>
+        <p:txBody>
+          <a:bodyPr/>
+          <a:p/>
+        </p:txBody>
       </p:sp>
       <p:sp>
         <p:nvSpPr>
@@ -28976,6 +29240,10 @@
             <a:tailEnd type="none"/>
           </a:ln>
         </p:spPr>
+        <p:txBody>
+          <a:bodyPr/>
+          <a:p/>
+        </p:txBody>
       </p:sp>
       <p:sp>
         <p:nvSpPr>
@@ -29001,6 +29269,10 @@
             <a:prstDash val="solid"/>
           </a:ln>
         </p:spPr>
+        <p:txBody>
+          <a:bodyPr/>
+          <a:p/>
+        </p:txBody>
       </p:sp>
       <p:sp>
         <p:nvSpPr>
@@ -29065,6 +29337,10 @@
             <a:prstDash val="solid"/>
           </a:ln>
         </p:spPr>
+        <p:txBody>
+          <a:bodyPr/>
+          <a:p/>
+        </p:txBody>
       </p:sp>
       <p:sp>
         <p:nvSpPr>
@@ -29129,6 +29405,10 @@
             <a:prstDash val="solid"/>
           </a:ln>
         </p:spPr>
+        <p:txBody>
+          <a:bodyPr/>
+          <a:p/>
+        </p:txBody>
       </p:sp>
       <p:sp>
         <p:nvSpPr>
@@ -29193,6 +29473,10 @@
             <a:prstDash val="solid"/>
           </a:ln>
         </p:spPr>
+        <p:txBody>
+          <a:bodyPr/>
+          <a:p/>
+        </p:txBody>
       </p:sp>
       <p:sp>
         <p:nvSpPr>
@@ -29257,6 +29541,10 @@
             <a:prstDash val="solid"/>
           </a:ln>
         </p:spPr>
+        <p:txBody>
+          <a:bodyPr/>
+          <a:p/>
+        </p:txBody>
       </p:sp>
       <p:sp>
         <p:nvSpPr>
@@ -29321,6 +29609,10 @@
             <a:prstDash val="solid"/>
           </a:ln>
         </p:spPr>
+        <p:txBody>
+          <a:bodyPr/>
+          <a:p/>
+        </p:txBody>
       </p:sp>
       <p:sp>
         <p:nvSpPr>
@@ -29851,7 +30143,7 @@
                 <a:ea typeface="Calibri" pitchFamily="34" charset="-122"/>
                 <a:cs typeface="Calibri" pitchFamily="34" charset="-120"/>
               </a:rPr>
-              <a:t>x = (½, ½, ½)</a:t>
+              <a:t>y = (½, ½, ½)</a:t>
             </a:r>
             <a:r>
               <a:rPr lang="en-US" sz="1400" dirty="0">
@@ -29918,7 +30210,7 @@
                 <a:ea typeface="Calibri" pitchFamily="34" charset="-122"/>
                 <a:cs typeface="Calibri" pitchFamily="34" charset="-120"/>
               </a:rPr>
-              <a:t>  (sum_x = 1.5, strictly &lt; IP = 7)</a:t>
+              <a:t>  (sum_y = 1.5, strictly &lt; IP = 7)</a:t>
             </a:r>
             <a:endParaRPr lang="en-US" sz="1400" dirty="0"/>
           </a:p>
@@ -29943,6 +30235,10 @@
           </a:solidFill>
           <a:ln/>
         </p:spPr>
+        <p:txBody>
+          <a:bodyPr/>
+          <a:p/>
+        </p:txBody>
       </p:sp>
       <p:sp>
         <p:nvSpPr>
@@ -29994,7 +30290,7 @@
                 <a:ea typeface="Calibri" pitchFamily="34" charset="-122"/>
                 <a:cs typeface="Calibri" pitchFamily="34" charset="-120"/>
               </a:rPr>
-              <a:t>Fractional sum_x is not a solver artefact. The LP frontier is a true lower bound; geographies that resist clean integer covering show the gap.</a:t>
+              <a:t>Fractional sum_y is not a solver artefact. The LP frontier is a true lower bound; geographies that resist clean integer covering show the gap.</a:t>
             </a:r>
             <a:endParaRPr lang="en-US" sz="1300" dirty="0"/>
           </a:p>
